--- a/dist/초4/수학/수와연산/초4_수학_수와연산_08_소수의덧셈과뺄셈.pptx
+++ b/dist/초4/수학/수와연산/초4_수학_수와연산_08_소수의덧셈과뺄셈.pptx
@@ -120,13 +120,13 @@
   <p:extLst>
     <p:ext uri="{521415D9-36F7-43E2-AB2F-B90AF26B5E84}">
       <p14:sectionLst xmlns:p14="http://schemas.microsoft.com/office/powerpoint/2010/main">
-        <p14:section name="도입" id="{91967275-67ac-42be-0d92-652d38ea59c4}">
+        <p14:section name="도입" id="{bd66ff60-3d9f-5cf6-b513-f05af832d2d1}">
           <p14:sldIdLst>
             <p14:sldId id="256"/>
             <p14:sldId id="257"/>
           </p14:sldIdLst>
         </p14:section>
-        <p14:section name="개념" id="{11e235e9-813a-1d00-04e8-d97c6f4e358b}">
+        <p14:section name="개념" id="{fc9b208b-a58c-6442-b94e-ae6b4ecea3c1}">
           <p14:sldIdLst>
             <p14:sldId id="258"/>
             <p14:sldId id="259"/>
@@ -134,32 +134,32 @@
             <p14:sldId id="263"/>
           </p14:sldIdLst>
         </p14:section>
-        <p14:section name="연습" id="{25feeaf3-476e-9948-8de1-ffd9e66829d0}">
+        <p14:section name="연습" id="{d5a68269-6551-618c-e4c6-4b5c9887480f}">
           <p14:sldIdLst>
             <p14:sldId id="260"/>
             <p14:sldId id="261"/>
             <p14:sldId id="264"/>
           </p14:sldIdLst>
         </p14:section>
-        <p14:section name="개념" id="{869b36e3-341b-aa9a-98da-89875aa02043}">
+        <p14:section name="개념" id="{ceb79d53-6cf3-ad0d-141b-34fd8424c618}">
           <p14:sldIdLst/>
         </p14:section>
-        <p14:section name="연습" id="{15ba5818-ebc1-5486-4a49-8e409f037ceb}">
+        <p14:section name="연습" id="{18e507fd-3bec-8f58-2ec1-7221e7e59ff5}">
           <p14:sldIdLst/>
         </p14:section>
-        <p14:section name="확인" id="{7453e20c-2e64-359d-bd9c-4ac9a45eadd7}">
+        <p14:section name="확인" id="{c1ad628e-00a1-4f30-9308-c9c2ce46d1be}">
           <p14:sldIdLst>
             <p14:sldId id="265"/>
             <p14:sldId id="266"/>
             <p14:sldId id="267"/>
           </p14:sldIdLst>
         </p14:section>
-        <p14:section name="정리" id="{d7d899f1-f34d-3865-1cd2-56c3ad39eed4}">
+        <p14:section name="정리" id="{7fc10d39-583a-98eb-1685-568a7172e7ba}">
           <p14:sldIdLst>
             <p14:sldId id="268"/>
           </p14:sldIdLst>
         </p14:section>
-        <p14:section name="보충" id="{c873e3f2-7541-1b83-8a98-4343ffcc73a8}">
+        <p14:section name="보충" id="{89ef4255-93c8-2318-c9e5-294e1c204cca}">
           <p14:sldIdLst>
             <p14:sldId id="269"/>
           </p14:sldIdLst>
